--- a/m4/diapositivos/sessao-09-m4-f08.pptx
+++ b/m4/diapositivos/sessao-09-m4-f08.pptx
@@ -3302,7 +3302,35 @@
                 <a:ea typeface="Arial" pitchFamily="34" charset="-122"/>
                 <a:cs typeface="Arial" pitchFamily="34" charset="-120"/>
               </a:rPr>
-              <a:t>Almeida Garrett, Frei Luís de Sousa (1844), ortografia atualizada, ato II, cena I.</a:t>
+              <a:t>Almeida Garrett, </a:t>
+            </a:r>
+            <a:pPr indent="0" marL="0">
+              <a:buNone/>
+            </a:pPr>
+            <a:r>
+              <a:rPr lang="en-US" sz="1200" i="1" dirty="0">
+                <a:solidFill>
+                  <a:srgbClr val="A9A79F"/>
+                </a:solidFill>
+                <a:latin typeface="Arial" pitchFamily="34" charset="0"/>
+                <a:ea typeface="Arial" pitchFamily="34" charset="-122"/>
+                <a:cs typeface="Arial" pitchFamily="34" charset="-120"/>
+              </a:rPr>
+              <a:t>Frei Luís de Sousa</a:t>
+            </a:r>
+            <a:pPr indent="0" marL="0">
+              <a:buNone/>
+            </a:pPr>
+            <a:r>
+              <a:rPr lang="en-US" sz="1200" dirty="0">
+                <a:solidFill>
+                  <a:srgbClr val="A9A79F"/>
+                </a:solidFill>
+                <a:latin typeface="Arial" pitchFamily="34" charset="0"/>
+                <a:ea typeface="Arial" pitchFamily="34" charset="-122"/>
+                <a:cs typeface="Arial" pitchFamily="34" charset="-120"/>
+              </a:rPr>
+              <a:t> (1844), ortografia atualizada, ato II, cena I.</a:t>
             </a:r>
             <a:endParaRPr lang="en-US" sz="1200" dirty="0"/>
           </a:p>
@@ -3762,7 +3790,35 @@
                 <a:ea typeface="Arial" pitchFamily="34" charset="-122"/>
                 <a:cs typeface="Arial" pitchFamily="34" charset="-120"/>
               </a:rPr>
-              <a:t>Almeida Garrett, Frei Luís de Sousa (1844), ortografia atualizada, ato II, cenas XIV e XV.</a:t>
+              <a:t>Almeida Garrett, </a:t>
+            </a:r>
+            <a:pPr indent="0" marL="0">
+              <a:buNone/>
+            </a:pPr>
+            <a:r>
+              <a:rPr lang="en-US" sz="1200" i="1" dirty="0">
+                <a:solidFill>
+                  <a:srgbClr val="A9A79F"/>
+                </a:solidFill>
+                <a:latin typeface="Arial" pitchFamily="34" charset="0"/>
+                <a:ea typeface="Arial" pitchFamily="34" charset="-122"/>
+                <a:cs typeface="Arial" pitchFamily="34" charset="-120"/>
+              </a:rPr>
+              <a:t>Frei Luís de Sousa</a:t>
+            </a:r>
+            <a:pPr indent="0" marL="0">
+              <a:buNone/>
+            </a:pPr>
+            <a:r>
+              <a:rPr lang="en-US" sz="1200" dirty="0">
+                <a:solidFill>
+                  <a:srgbClr val="A9A79F"/>
+                </a:solidFill>
+                <a:latin typeface="Arial" pitchFamily="34" charset="0"/>
+                <a:ea typeface="Arial" pitchFamily="34" charset="-122"/>
+                <a:cs typeface="Arial" pitchFamily="34" charset="-120"/>
+              </a:rPr>
+              <a:t> (1844), ortografia atualizada, ato II, cenas XIV e XV.</a:t>
             </a:r>
             <a:endParaRPr lang="en-US" sz="1200" dirty="0"/>
           </a:p>
@@ -4102,7 +4158,35 @@
                 <a:ea typeface="Arial" pitchFamily="34" charset="-122"/>
                 <a:cs typeface="Arial" pitchFamily="34" charset="-120"/>
               </a:rPr>
-              <a:t>Almeida Garrett, Frei Luís de Sousa (1844), ortografia atualizada, ato II, cenas XIV e XV.</a:t>
+              <a:t>Almeida Garrett, </a:t>
+            </a:r>
+            <a:pPr indent="0" marL="0">
+              <a:buNone/>
+            </a:pPr>
+            <a:r>
+              <a:rPr lang="en-US" sz="1200" i="1" dirty="0">
+                <a:solidFill>
+                  <a:srgbClr val="A9A79F"/>
+                </a:solidFill>
+                <a:latin typeface="Arial" pitchFamily="34" charset="0"/>
+                <a:ea typeface="Arial" pitchFamily="34" charset="-122"/>
+                <a:cs typeface="Arial" pitchFamily="34" charset="-120"/>
+              </a:rPr>
+              <a:t>Frei Luís de Sousa</a:t>
+            </a:r>
+            <a:pPr indent="0" marL="0">
+              <a:buNone/>
+            </a:pPr>
+            <a:r>
+              <a:rPr lang="en-US" sz="1200" dirty="0">
+                <a:solidFill>
+                  <a:srgbClr val="A9A79F"/>
+                </a:solidFill>
+                <a:latin typeface="Arial" pitchFamily="34" charset="0"/>
+                <a:ea typeface="Arial" pitchFamily="34" charset="-122"/>
+                <a:cs typeface="Arial" pitchFamily="34" charset="-120"/>
+              </a:rPr>
+              <a:t> (1844), ortografia atualizada, ato II, cenas XIV e XV.</a:t>
             </a:r>
             <a:endParaRPr lang="en-US" sz="1200" dirty="0"/>
           </a:p>

--- a/m4/diapositivos/sessao-09-m4-f08.pptx
+++ b/m4/diapositivos/sessao-09-m4-f08.pptx
@@ -16,9 +16,10 @@
     <p:sldId id="264" r:id="rId10"/>
     <p:sldId id="265" r:id="rId11"/>
     <p:sldId id="266" r:id="rId12"/>
+    <p:sldId id="267" r:id="rId13"/>
   </p:sldIdLst>
   <p:notesMasterIdLst>
-    <p:notesMasterId r:id="rId13"/>
+    <p:notesMasterId r:id="rId14"/>
   </p:notesMasterIdLst>
   <p:sldSz cx="12192000" cy="6858000"/>
   <p:notesSz cx="6858000" cy="12192000"/>
@@ -1497,7 +1498,7 @@
                 <a:ea typeface="Arial" pitchFamily="34" charset="-122"/>
                 <a:cs typeface="Arial" pitchFamily="34" charset="-120"/>
               </a:rPr>
-              <a:t>SÍNTESE</a:t>
+              <a:t>NO ATLAS LUSÓFONO (OPCIONAL)</a:t>
             </a:r>
             <a:endParaRPr lang="en-US" sz="1100" dirty="0"/>
           </a:p>
@@ -1538,7 +1539,7 @@
                 <a:ea typeface="Arial" pitchFamily="34" charset="-122"/>
                 <a:cs typeface="Arial" pitchFamily="34" charset="-120"/>
               </a:rPr>
-              <a:t>Para fixar</a:t>
+              <a:t>João Botelho, Portugal</a:t>
             </a:r>
             <a:endParaRPr lang="en-US" sz="3400" dirty="0"/>
           </a:p>
@@ -1571,101 +1572,14 @@
       </p:sp>
       <p:sp>
         <p:nvSpPr>
-          <p:cNvPr id="10" name="Shape 7"/>
-          <p:cNvSpPr/>
-          <p:nvPr/>
-        </p:nvSpPr>
-        <p:spPr>
-          <a:xfrm>
-            <a:off x="1005840" y="2286000"/>
-            <a:ext cx="0" cy="2447544"/>
-          </a:xfrm>
-          <a:prstGeom prst="line">
-            <a:avLst/>
-          </a:prstGeom>
-          <a:noFill/>
-          <a:ln w="12700">
-            <a:solidFill>
-              <a:srgbClr val="A9A79F"/>
-            </a:solidFill>
-            <a:prstDash val="solid"/>
-          </a:ln>
-        </p:spPr>
-      </p:sp>
-      <p:sp>
-        <p:nvSpPr>
-          <p:cNvPr id="11" name="Shape 8"/>
-          <p:cNvSpPr/>
-          <p:nvPr/>
-        </p:nvSpPr>
-        <p:spPr>
-          <a:xfrm>
-            <a:off x="822960" y="2103120"/>
-            <a:ext cx="365760" cy="365760"/>
-          </a:xfrm>
-          <a:prstGeom prst="ellipse">
-            <a:avLst/>
-          </a:prstGeom>
-          <a:solidFill>
-            <a:srgbClr val="111111"/>
-          </a:solidFill>
-          <a:ln w="15875">
-            <a:solidFill>
-              <a:srgbClr val="F2F0EA"/>
-            </a:solidFill>
-            <a:prstDash val="solid"/>
-          </a:ln>
-        </p:spPr>
-      </p:sp>
-      <p:sp>
-        <p:nvSpPr>
-          <p:cNvPr id="12" name="Text 9"/>
-          <p:cNvSpPr/>
-          <p:nvPr/>
-        </p:nvSpPr>
-        <p:spPr>
-          <a:xfrm>
-            <a:off x="822960" y="2103120"/>
-            <a:ext cx="365760" cy="365760"/>
-          </a:xfrm>
-          <a:prstGeom prst="rect">
-            <a:avLst/>
-          </a:prstGeom>
-          <a:noFill/>
-          <a:ln/>
-        </p:spPr>
-        <p:txBody>
-          <a:bodyPr wrap="square" lIns="0" tIns="0" rIns="0" bIns="0" rtlCol="0" anchor="ctr"/>
-          <a:lstStyle/>
-          <a:p>
-            <a:pPr algn="ctr" indent="0" marL="0">
-              <a:buNone/>
-            </a:pPr>
-            <a:r>
-              <a:rPr lang="en-US" sz="1300" b="1" dirty="0">
-                <a:solidFill>
-                  <a:srgbClr val="F2F0EA"/>
-                </a:solidFill>
-                <a:latin typeface="Arial" pitchFamily="34" charset="0"/>
-                <a:ea typeface="Arial" pitchFamily="34" charset="-122"/>
-                <a:cs typeface="Arial" pitchFamily="34" charset="-120"/>
-              </a:rPr>
-              <a:t>1</a:t>
-            </a:r>
-            <a:endParaRPr lang="en-US" sz="1300" dirty="0"/>
-          </a:p>
-        </p:txBody>
-      </p:sp>
-      <p:sp>
-        <p:nvSpPr>
-          <p:cNvPr id="13" name="Text 10"/>
-          <p:cNvSpPr/>
-          <p:nvPr/>
-        </p:nvSpPr>
-        <p:spPr>
-          <a:xfrm>
-            <a:off x="1417320" y="2112264"/>
-            <a:ext cx="9174175" cy="1223772"/>
+          <p:cNvPr id="10" name="Text 7"/>
+          <p:cNvSpPr/>
+          <p:nvPr/>
+        </p:nvSpPr>
+        <p:spPr>
+          <a:xfrm>
+            <a:off x="822960" y="2057400"/>
+            <a:ext cx="9814255" cy="4023360"/>
           </a:xfrm>
           <a:prstGeom prst="rect">
             <a:avLst/>
@@ -1681,238 +1595,105 @@
           <a:p>
             <a:pPr indent="0" marL="0">
               <a:lnSpc>
-                <a:spcPct val="105000"/>
+                <a:spcPct val="110000"/>
               </a:lnSpc>
-              <a:buNone/>
-            </a:pPr>
-            <a:r>
-              <a:rPr lang="en-US" sz="2200" dirty="0">
+              <a:spcAft>
+                <a:spcPts val="1400"/>
+              </a:spcAft>
+              <a:buNone/>
+            </a:pPr>
+            <a:r>
+              <a:rPr lang="en-US" sz="2800" dirty="0">
                 <a:solidFill>
                   <a:srgbClr val="F2F0EA"/>
                 </a:solidFill>
-                <a:latin typeface="Arial" pitchFamily="34" charset="0"/>
-                <a:ea typeface="Arial" pitchFamily="34" charset="-122"/>
-                <a:cs typeface="Arial" pitchFamily="34" charset="-120"/>
-              </a:rPr>
-              <a:t>No ato II, Maria aponta para «este retrato aqui» e Telmo cala; vinte anos depois de Alcácer Quibir, o Romeiro aponta para o mesmo retrato e responde «Ninguém».</a:t>
-            </a:r>
-            <a:endParaRPr lang="en-US" sz="2200" dirty="0"/>
-          </a:p>
-        </p:txBody>
-      </p:sp>
-      <p:sp>
-        <p:nvSpPr>
-          <p:cNvPr id="14" name="Shape 11"/>
-          <p:cNvSpPr/>
-          <p:nvPr/>
-        </p:nvSpPr>
-        <p:spPr>
-          <a:xfrm>
-            <a:off x="822960" y="3326892"/>
-            <a:ext cx="365760" cy="365760"/>
-          </a:xfrm>
-          <a:prstGeom prst="ellipse">
-            <a:avLst/>
-          </a:prstGeom>
-          <a:solidFill>
-            <a:srgbClr val="111111"/>
-          </a:solidFill>
-          <a:ln w="15875">
-            <a:solidFill>
-              <a:srgbClr val="F2F0EA"/>
-            </a:solidFill>
-            <a:prstDash val="solid"/>
-          </a:ln>
-        </p:spPr>
-      </p:sp>
-      <p:sp>
-        <p:nvSpPr>
-          <p:cNvPr id="15" name="Text 12"/>
-          <p:cNvSpPr/>
-          <p:nvPr/>
-        </p:nvSpPr>
-        <p:spPr>
-          <a:xfrm>
-            <a:off x="822960" y="3326892"/>
-            <a:ext cx="365760" cy="365760"/>
-          </a:xfrm>
-          <a:prstGeom prst="rect">
-            <a:avLst/>
-          </a:prstGeom>
-          <a:noFill/>
-          <a:ln/>
-        </p:spPr>
-        <p:txBody>
-          <a:bodyPr wrap="square" lIns="0" tIns="0" rIns="0" bIns="0" rtlCol="0" anchor="ctr"/>
-          <a:lstStyle/>
-          <a:p>
-            <a:pPr algn="ctr" indent="0" marL="0">
-              <a:buNone/>
-            </a:pPr>
-            <a:r>
-              <a:rPr lang="en-US" sz="1300" b="1" dirty="0">
-                <a:solidFill>
-                  <a:srgbClr val="F2F0EA"/>
-                </a:solidFill>
-                <a:latin typeface="Arial" pitchFamily="34" charset="0"/>
-                <a:ea typeface="Arial" pitchFamily="34" charset="-122"/>
-                <a:cs typeface="Arial" pitchFamily="34" charset="-120"/>
-              </a:rPr>
-              <a:t>2</a:t>
-            </a:r>
-            <a:endParaRPr lang="en-US" sz="1300" dirty="0"/>
-          </a:p>
-        </p:txBody>
-      </p:sp>
-      <p:sp>
-        <p:nvSpPr>
-          <p:cNvPr id="16" name="Text 13"/>
-          <p:cNvSpPr/>
-          <p:nvPr/>
-        </p:nvSpPr>
-        <p:spPr>
-          <a:xfrm>
-            <a:off x="1417320" y="3336036"/>
-            <a:ext cx="9174175" cy="1223772"/>
-          </a:xfrm>
-          <a:prstGeom prst="rect">
-            <a:avLst/>
-          </a:prstGeom>
-          <a:noFill/>
-          <a:ln/>
-        </p:spPr>
-        <p:txBody>
-          <a:bodyPr wrap="square" lIns="0" tIns="0" rIns="0" bIns="0" rtlCol="0" anchor="t">
-            <a:normAutofit/>
-          </a:bodyPr>
-          <a:lstStyle/>
-          <a:p>
+                <a:latin typeface="Georgia" pitchFamily="34" charset="0"/>
+                <a:ea typeface="Georgia" pitchFamily="34" charset="-122"/>
+                <a:cs typeface="Georgia" pitchFamily="34" charset="-120"/>
+              </a:rPr>
+              <a:t>Em 2001, João Botelho adapta ao cinema </a:t>
+            </a:r>
             <a:pPr indent="0" marL="0">
               <a:lnSpc>
-                <a:spcPct val="105000"/>
+                <a:spcPct val="110000"/>
               </a:lnSpc>
-              <a:buNone/>
-            </a:pPr>
-            <a:r>
-              <a:rPr lang="en-US" sz="2200" dirty="0">
+              <a:spcAft>
+                <a:spcPts val="1400"/>
+              </a:spcAft>
+              <a:buNone/>
+            </a:pPr>
+            <a:r>
+              <a:rPr lang="en-US" sz="2800" i="1" dirty="0">
                 <a:solidFill>
                   <a:srgbClr val="F2F0EA"/>
                 </a:solidFill>
-                <a:latin typeface="Arial" pitchFamily="34" charset="0"/>
-                <a:ea typeface="Arial" pitchFamily="34" charset="-122"/>
-                <a:cs typeface="Arial" pitchFamily="34" charset="-120"/>
-              </a:rPr>
-              <a:t>A palavra e o gesto dizem juntos o que ninguém quer dizer: D. João está vivo, mas perdeu o lugar, o nome e a casa, e já só existe como imagem.</a:t>
-            </a:r>
-            <a:endParaRPr lang="en-US" sz="2200" dirty="0"/>
-          </a:p>
-        </p:txBody>
-      </p:sp>
-      <p:sp>
-        <p:nvSpPr>
-          <p:cNvPr id="17" name="Shape 14"/>
-          <p:cNvSpPr/>
-          <p:nvPr/>
-        </p:nvSpPr>
-        <p:spPr>
-          <a:xfrm>
-            <a:off x="822960" y="4550664"/>
-            <a:ext cx="365760" cy="365760"/>
-          </a:xfrm>
-          <a:prstGeom prst="ellipse">
-            <a:avLst/>
-          </a:prstGeom>
-          <a:solidFill>
-            <a:srgbClr val="111111"/>
-          </a:solidFill>
-          <a:ln w="15875">
-            <a:solidFill>
-              <a:srgbClr val="F2F0EA"/>
-            </a:solidFill>
-            <a:prstDash val="solid"/>
-          </a:ln>
-        </p:spPr>
-      </p:sp>
-      <p:sp>
-        <p:nvSpPr>
-          <p:cNvPr id="18" name="Text 15"/>
-          <p:cNvSpPr/>
-          <p:nvPr/>
-        </p:nvSpPr>
-        <p:spPr>
-          <a:xfrm>
-            <a:off x="822960" y="4550664"/>
-            <a:ext cx="365760" cy="365760"/>
-          </a:xfrm>
-          <a:prstGeom prst="rect">
-            <a:avLst/>
-          </a:prstGeom>
-          <a:noFill/>
-          <a:ln/>
-        </p:spPr>
-        <p:txBody>
-          <a:bodyPr wrap="square" lIns="0" tIns="0" rIns="0" bIns="0" rtlCol="0" anchor="ctr"/>
-          <a:lstStyle/>
-          <a:p>
-            <a:pPr algn="ctr" indent="0" marL="0">
-              <a:buNone/>
-            </a:pPr>
-            <a:r>
-              <a:rPr lang="en-US" sz="1300" b="1" dirty="0">
-                <a:solidFill>
-                  <a:srgbClr val="F2F0EA"/>
-                </a:solidFill>
-                <a:latin typeface="Arial" pitchFamily="34" charset="0"/>
-                <a:ea typeface="Arial" pitchFamily="34" charset="-122"/>
-                <a:cs typeface="Arial" pitchFamily="34" charset="-120"/>
-              </a:rPr>
-              <a:t>3</a:t>
-            </a:r>
-            <a:endParaRPr lang="en-US" sz="1300" dirty="0"/>
-          </a:p>
-        </p:txBody>
-      </p:sp>
-      <p:sp>
-        <p:nvSpPr>
-          <p:cNvPr id="19" name="Text 16"/>
-          <p:cNvSpPr/>
-          <p:nvPr/>
-        </p:nvSpPr>
-        <p:spPr>
-          <a:xfrm>
-            <a:off x="1417320" y="4559808"/>
-            <a:ext cx="9174175" cy="882904"/>
-          </a:xfrm>
-          <a:prstGeom prst="rect">
-            <a:avLst/>
-          </a:prstGeom>
-          <a:noFill/>
-          <a:ln/>
-        </p:spPr>
-        <p:txBody>
-          <a:bodyPr wrap="square" lIns="0" tIns="0" rIns="0" bIns="0" rtlCol="0" anchor="t">
-            <a:normAutofit/>
-          </a:bodyPr>
-          <a:lstStyle/>
-          <a:p>
+                <a:latin typeface="Georgia" pitchFamily="34" charset="0"/>
+                <a:ea typeface="Georgia" pitchFamily="34" charset="-122"/>
+                <a:cs typeface="Georgia" pitchFamily="34" charset="-120"/>
+              </a:rPr>
+              <a:t>Frei Luís de Sousa</a:t>
+            </a:r>
             <a:pPr indent="0" marL="0">
               <a:lnSpc>
-                <a:spcPct val="105000"/>
+                <a:spcPct val="110000"/>
               </a:lnSpc>
-              <a:buNone/>
-            </a:pPr>
-            <a:r>
-              <a:rPr lang="en-US" sz="2200" dirty="0">
+              <a:spcAft>
+                <a:spcPts val="1400"/>
+              </a:spcAft>
+              <a:buNone/>
+            </a:pPr>
+            <a:r>
+              <a:rPr lang="en-US" sz="2800" dirty="0">
                 <a:solidFill>
                   <a:srgbClr val="F2F0EA"/>
                 </a:solidFill>
-                <a:latin typeface="Arial" pitchFamily="34" charset="0"/>
-                <a:ea typeface="Arial" pitchFamily="34" charset="-122"/>
-                <a:cs typeface="Arial" pitchFamily="34" charset="-120"/>
-              </a:rPr>
-              <a:t>Os deíticos, «este», «aqui», «tu», «aquele», só têm sentido em cena: é o teatro a apontar.</a:t>
-            </a:r>
-            <a:endParaRPr lang="en-US" sz="2200" dirty="0"/>
+                <a:latin typeface="Georgia" pitchFamily="34" charset="0"/>
+                <a:ea typeface="Georgia" pitchFamily="34" charset="-122"/>
+                <a:cs typeface="Georgia" pitchFamily="34" charset="-120"/>
+              </a:rPr>
+              <a:t>, de Garrett, e dá ao filme o título </a:t>
+            </a:r>
+            <a:pPr indent="0" marL="0">
+              <a:lnSpc>
+                <a:spcPct val="110000"/>
+              </a:lnSpc>
+              <a:spcAft>
+                <a:spcPts val="1400"/>
+              </a:spcAft>
+              <a:buNone/>
+            </a:pPr>
+            <a:r>
+              <a:rPr lang="en-US" sz="2800" i="1" dirty="0">
+                <a:solidFill>
+                  <a:srgbClr val="F2F0EA"/>
+                </a:solidFill>
+                <a:latin typeface="Georgia" pitchFamily="34" charset="0"/>
+                <a:ea typeface="Georgia" pitchFamily="34" charset="-122"/>
+                <a:cs typeface="Georgia" pitchFamily="34" charset="-120"/>
+              </a:rPr>
+              <a:t>Quem És Tu?</a:t>
+            </a:r>
+            <a:pPr indent="0" marL="0">
+              <a:lnSpc>
+                <a:spcPct val="110000"/>
+              </a:lnSpc>
+              <a:spcAft>
+                <a:spcPts val="1400"/>
+              </a:spcAft>
+              <a:buNone/>
+            </a:pPr>
+            <a:r>
+              <a:rPr lang="en-US" sz="2800" dirty="0">
+                <a:solidFill>
+                  <a:srgbClr val="F2F0EA"/>
+                </a:solidFill>
+                <a:latin typeface="Georgia" pitchFamily="34" charset="0"/>
+                <a:ea typeface="Georgia" pitchFamily="34" charset="-122"/>
+                <a:cs typeface="Georgia" pitchFamily="34" charset="-120"/>
+              </a:rPr>
+              <a:t>.</a:t>
+            </a:r>
+            <a:endParaRPr lang="en-US" sz="2800" dirty="0"/>
           </a:p>
         </p:txBody>
       </p:sp>
@@ -2060,6 +1841,629 @@
                 <a:cs typeface="Arial" pitchFamily="34" charset="-120"/>
               </a:rPr>
               <a:t>11</a:t>
+            </a:r>
+            <a:endParaRPr lang="en-US" sz="1000" dirty="0"/>
+          </a:p>
+        </p:txBody>
+      </p:sp>
+      <p:sp>
+        <p:nvSpPr>
+          <p:cNvPr id="6" name="Shape 3"/>
+          <p:cNvSpPr/>
+          <p:nvPr/>
+        </p:nvSpPr>
+        <p:spPr>
+          <a:xfrm>
+            <a:off x="822960" y="502920"/>
+            <a:ext cx="201168" cy="201168"/>
+          </a:xfrm>
+          <a:prstGeom prst="triangle">
+            <a:avLst/>
+          </a:prstGeom>
+          <a:ln w="19050">
+            <a:solidFill>
+              <a:srgbClr val="F2F0EA"/>
+            </a:solidFill>
+            <a:prstDash val="solid"/>
+          </a:ln>
+        </p:spPr>
+      </p:sp>
+      <p:sp>
+        <p:nvSpPr>
+          <p:cNvPr id="7" name="Text 4"/>
+          <p:cNvSpPr/>
+          <p:nvPr/>
+        </p:nvSpPr>
+        <p:spPr>
+          <a:xfrm>
+            <a:off x="1188720" y="457200"/>
+            <a:ext cx="9448495" cy="292608"/>
+          </a:xfrm>
+          <a:prstGeom prst="rect">
+            <a:avLst/>
+          </a:prstGeom>
+          <a:noFill/>
+          <a:ln/>
+        </p:spPr>
+        <p:txBody>
+          <a:bodyPr wrap="square" lIns="0" tIns="0" rIns="0" bIns="0" rtlCol="0" anchor="ctr"/>
+          <a:lstStyle/>
+          <a:p>
+            <a:pPr indent="0" marL="0">
+              <a:buNone/>
+            </a:pPr>
+            <a:r>
+              <a:rPr lang="en-US" sz="1100" b="1" spc="250" kern="0" dirty="0">
+                <a:solidFill>
+                  <a:srgbClr val="A9A79F"/>
+                </a:solidFill>
+                <a:latin typeface="Arial" pitchFamily="34" charset="0"/>
+                <a:ea typeface="Arial" pitchFamily="34" charset="-122"/>
+                <a:cs typeface="Arial" pitchFamily="34" charset="-120"/>
+              </a:rPr>
+              <a:t>SÍNTESE</a:t>
+            </a:r>
+            <a:endParaRPr lang="en-US" sz="1100" dirty="0"/>
+          </a:p>
+        </p:txBody>
+      </p:sp>
+      <p:sp>
+        <p:nvSpPr>
+          <p:cNvPr id="8" name="Text 5"/>
+          <p:cNvSpPr/>
+          <p:nvPr/>
+        </p:nvSpPr>
+        <p:spPr>
+          <a:xfrm>
+            <a:off x="822960" y="868680"/>
+            <a:ext cx="9814255" cy="822960"/>
+          </a:xfrm>
+          <a:prstGeom prst="rect">
+            <a:avLst/>
+          </a:prstGeom>
+          <a:noFill/>
+          <a:ln/>
+        </p:spPr>
+        <p:txBody>
+          <a:bodyPr wrap="square" lIns="0" tIns="0" rIns="0" bIns="0" rtlCol="0" anchor="b">
+            <a:normAutofit/>
+          </a:bodyPr>
+          <a:lstStyle/>
+          <a:p>
+            <a:pPr indent="0" marL="0">
+              <a:buNone/>
+            </a:pPr>
+            <a:r>
+              <a:rPr lang="en-US" sz="3400" dirty="0">
+                <a:solidFill>
+                  <a:srgbClr val="F2F0EA"/>
+                </a:solidFill>
+                <a:latin typeface="Arial" pitchFamily="34" charset="0"/>
+                <a:ea typeface="Arial" pitchFamily="34" charset="-122"/>
+                <a:cs typeface="Arial" pitchFamily="34" charset="-120"/>
+              </a:rPr>
+              <a:t>Para fixar</a:t>
+            </a:r>
+            <a:endParaRPr lang="en-US" sz="3400" dirty="0"/>
+          </a:p>
+        </p:txBody>
+      </p:sp>
+      <p:sp>
+        <p:nvSpPr>
+          <p:cNvPr id="9" name="Shape 6"/>
+          <p:cNvSpPr/>
+          <p:nvPr/>
+        </p:nvSpPr>
+        <p:spPr>
+          <a:xfrm>
+            <a:off x="822960" y="1746504"/>
+            <a:ext cx="640080" cy="64008"/>
+          </a:xfrm>
+          <a:prstGeom prst="rect">
+            <a:avLst/>
+          </a:prstGeom>
+          <a:solidFill>
+            <a:srgbClr val="E4555C"/>
+          </a:solidFill>
+          <a:ln w="12700">
+            <a:solidFill>
+              <a:srgbClr val="E4555C"/>
+            </a:solidFill>
+            <a:prstDash val="solid"/>
+          </a:ln>
+        </p:spPr>
+      </p:sp>
+      <p:sp>
+        <p:nvSpPr>
+          <p:cNvPr id="10" name="Shape 7"/>
+          <p:cNvSpPr/>
+          <p:nvPr/>
+        </p:nvSpPr>
+        <p:spPr>
+          <a:xfrm>
+            <a:off x="1005840" y="2286000"/>
+            <a:ext cx="0" cy="2447544"/>
+          </a:xfrm>
+          <a:prstGeom prst="line">
+            <a:avLst/>
+          </a:prstGeom>
+          <a:noFill/>
+          <a:ln w="12700">
+            <a:solidFill>
+              <a:srgbClr val="A9A79F"/>
+            </a:solidFill>
+            <a:prstDash val="solid"/>
+          </a:ln>
+        </p:spPr>
+      </p:sp>
+      <p:sp>
+        <p:nvSpPr>
+          <p:cNvPr id="11" name="Shape 8"/>
+          <p:cNvSpPr/>
+          <p:nvPr/>
+        </p:nvSpPr>
+        <p:spPr>
+          <a:xfrm>
+            <a:off x="822960" y="2103120"/>
+            <a:ext cx="365760" cy="365760"/>
+          </a:xfrm>
+          <a:prstGeom prst="ellipse">
+            <a:avLst/>
+          </a:prstGeom>
+          <a:solidFill>
+            <a:srgbClr val="111111"/>
+          </a:solidFill>
+          <a:ln w="15875">
+            <a:solidFill>
+              <a:srgbClr val="F2F0EA"/>
+            </a:solidFill>
+            <a:prstDash val="solid"/>
+          </a:ln>
+        </p:spPr>
+      </p:sp>
+      <p:sp>
+        <p:nvSpPr>
+          <p:cNvPr id="12" name="Text 9"/>
+          <p:cNvSpPr/>
+          <p:nvPr/>
+        </p:nvSpPr>
+        <p:spPr>
+          <a:xfrm>
+            <a:off x="822960" y="2103120"/>
+            <a:ext cx="365760" cy="365760"/>
+          </a:xfrm>
+          <a:prstGeom prst="rect">
+            <a:avLst/>
+          </a:prstGeom>
+          <a:noFill/>
+          <a:ln/>
+        </p:spPr>
+        <p:txBody>
+          <a:bodyPr wrap="square" lIns="0" tIns="0" rIns="0" bIns="0" rtlCol="0" anchor="ctr"/>
+          <a:lstStyle/>
+          <a:p>
+            <a:pPr algn="ctr" indent="0" marL="0">
+              <a:buNone/>
+            </a:pPr>
+            <a:r>
+              <a:rPr lang="en-US" sz="1300" b="1" dirty="0">
+                <a:solidFill>
+                  <a:srgbClr val="F2F0EA"/>
+                </a:solidFill>
+                <a:latin typeface="Arial" pitchFamily="34" charset="0"/>
+                <a:ea typeface="Arial" pitchFamily="34" charset="-122"/>
+                <a:cs typeface="Arial" pitchFamily="34" charset="-120"/>
+              </a:rPr>
+              <a:t>1</a:t>
+            </a:r>
+            <a:endParaRPr lang="en-US" sz="1300" dirty="0"/>
+          </a:p>
+        </p:txBody>
+      </p:sp>
+      <p:sp>
+        <p:nvSpPr>
+          <p:cNvPr id="13" name="Text 10"/>
+          <p:cNvSpPr/>
+          <p:nvPr/>
+        </p:nvSpPr>
+        <p:spPr>
+          <a:xfrm>
+            <a:off x="1417320" y="2112264"/>
+            <a:ext cx="9174175" cy="1223772"/>
+          </a:xfrm>
+          <a:prstGeom prst="rect">
+            <a:avLst/>
+          </a:prstGeom>
+          <a:noFill/>
+          <a:ln/>
+        </p:spPr>
+        <p:txBody>
+          <a:bodyPr wrap="square" lIns="0" tIns="0" rIns="0" bIns="0" rtlCol="0" anchor="t">
+            <a:normAutofit/>
+          </a:bodyPr>
+          <a:lstStyle/>
+          <a:p>
+            <a:pPr indent="0" marL="0">
+              <a:lnSpc>
+                <a:spcPct val="105000"/>
+              </a:lnSpc>
+              <a:buNone/>
+            </a:pPr>
+            <a:r>
+              <a:rPr lang="en-US" sz="2200" dirty="0">
+                <a:solidFill>
+                  <a:srgbClr val="F2F0EA"/>
+                </a:solidFill>
+                <a:latin typeface="Arial" pitchFamily="34" charset="0"/>
+                <a:ea typeface="Arial" pitchFamily="34" charset="-122"/>
+                <a:cs typeface="Arial" pitchFamily="34" charset="-120"/>
+              </a:rPr>
+              <a:t>No ato II, Maria aponta para «este retrato aqui» e Telmo cala; vinte anos depois de Alcácer Quibir, o Romeiro aponta para o mesmo retrato e responde «Ninguém».</a:t>
+            </a:r>
+            <a:endParaRPr lang="en-US" sz="2200" dirty="0"/>
+          </a:p>
+        </p:txBody>
+      </p:sp>
+      <p:sp>
+        <p:nvSpPr>
+          <p:cNvPr id="14" name="Shape 11"/>
+          <p:cNvSpPr/>
+          <p:nvPr/>
+        </p:nvSpPr>
+        <p:spPr>
+          <a:xfrm>
+            <a:off x="822960" y="3326892"/>
+            <a:ext cx="365760" cy="365760"/>
+          </a:xfrm>
+          <a:prstGeom prst="ellipse">
+            <a:avLst/>
+          </a:prstGeom>
+          <a:solidFill>
+            <a:srgbClr val="111111"/>
+          </a:solidFill>
+          <a:ln w="15875">
+            <a:solidFill>
+              <a:srgbClr val="F2F0EA"/>
+            </a:solidFill>
+            <a:prstDash val="solid"/>
+          </a:ln>
+        </p:spPr>
+      </p:sp>
+      <p:sp>
+        <p:nvSpPr>
+          <p:cNvPr id="15" name="Text 12"/>
+          <p:cNvSpPr/>
+          <p:nvPr/>
+        </p:nvSpPr>
+        <p:spPr>
+          <a:xfrm>
+            <a:off x="822960" y="3326892"/>
+            <a:ext cx="365760" cy="365760"/>
+          </a:xfrm>
+          <a:prstGeom prst="rect">
+            <a:avLst/>
+          </a:prstGeom>
+          <a:noFill/>
+          <a:ln/>
+        </p:spPr>
+        <p:txBody>
+          <a:bodyPr wrap="square" lIns="0" tIns="0" rIns="0" bIns="0" rtlCol="0" anchor="ctr"/>
+          <a:lstStyle/>
+          <a:p>
+            <a:pPr algn="ctr" indent="0" marL="0">
+              <a:buNone/>
+            </a:pPr>
+            <a:r>
+              <a:rPr lang="en-US" sz="1300" b="1" dirty="0">
+                <a:solidFill>
+                  <a:srgbClr val="F2F0EA"/>
+                </a:solidFill>
+                <a:latin typeface="Arial" pitchFamily="34" charset="0"/>
+                <a:ea typeface="Arial" pitchFamily="34" charset="-122"/>
+                <a:cs typeface="Arial" pitchFamily="34" charset="-120"/>
+              </a:rPr>
+              <a:t>2</a:t>
+            </a:r>
+            <a:endParaRPr lang="en-US" sz="1300" dirty="0"/>
+          </a:p>
+        </p:txBody>
+      </p:sp>
+      <p:sp>
+        <p:nvSpPr>
+          <p:cNvPr id="16" name="Text 13"/>
+          <p:cNvSpPr/>
+          <p:nvPr/>
+        </p:nvSpPr>
+        <p:spPr>
+          <a:xfrm>
+            <a:off x="1417320" y="3336036"/>
+            <a:ext cx="9174175" cy="1223772"/>
+          </a:xfrm>
+          <a:prstGeom prst="rect">
+            <a:avLst/>
+          </a:prstGeom>
+          <a:noFill/>
+          <a:ln/>
+        </p:spPr>
+        <p:txBody>
+          <a:bodyPr wrap="square" lIns="0" tIns="0" rIns="0" bIns="0" rtlCol="0" anchor="t">
+            <a:normAutofit/>
+          </a:bodyPr>
+          <a:lstStyle/>
+          <a:p>
+            <a:pPr indent="0" marL="0">
+              <a:lnSpc>
+                <a:spcPct val="105000"/>
+              </a:lnSpc>
+              <a:buNone/>
+            </a:pPr>
+            <a:r>
+              <a:rPr lang="en-US" sz="2200" dirty="0">
+                <a:solidFill>
+                  <a:srgbClr val="F2F0EA"/>
+                </a:solidFill>
+                <a:latin typeface="Arial" pitchFamily="34" charset="0"/>
+                <a:ea typeface="Arial" pitchFamily="34" charset="-122"/>
+                <a:cs typeface="Arial" pitchFamily="34" charset="-120"/>
+              </a:rPr>
+              <a:t>A palavra e o gesto dizem juntos o que ninguém quer dizer: D. João está vivo, mas perdeu o lugar, o nome e a casa, e já só existe como imagem.</a:t>
+            </a:r>
+            <a:endParaRPr lang="en-US" sz="2200" dirty="0"/>
+          </a:p>
+        </p:txBody>
+      </p:sp>
+      <p:sp>
+        <p:nvSpPr>
+          <p:cNvPr id="17" name="Shape 14"/>
+          <p:cNvSpPr/>
+          <p:nvPr/>
+        </p:nvSpPr>
+        <p:spPr>
+          <a:xfrm>
+            <a:off x="822960" y="4550664"/>
+            <a:ext cx="365760" cy="365760"/>
+          </a:xfrm>
+          <a:prstGeom prst="ellipse">
+            <a:avLst/>
+          </a:prstGeom>
+          <a:solidFill>
+            <a:srgbClr val="111111"/>
+          </a:solidFill>
+          <a:ln w="15875">
+            <a:solidFill>
+              <a:srgbClr val="F2F0EA"/>
+            </a:solidFill>
+            <a:prstDash val="solid"/>
+          </a:ln>
+        </p:spPr>
+      </p:sp>
+      <p:sp>
+        <p:nvSpPr>
+          <p:cNvPr id="18" name="Text 15"/>
+          <p:cNvSpPr/>
+          <p:nvPr/>
+        </p:nvSpPr>
+        <p:spPr>
+          <a:xfrm>
+            <a:off x="822960" y="4550664"/>
+            <a:ext cx="365760" cy="365760"/>
+          </a:xfrm>
+          <a:prstGeom prst="rect">
+            <a:avLst/>
+          </a:prstGeom>
+          <a:noFill/>
+          <a:ln/>
+        </p:spPr>
+        <p:txBody>
+          <a:bodyPr wrap="square" lIns="0" tIns="0" rIns="0" bIns="0" rtlCol="0" anchor="ctr"/>
+          <a:lstStyle/>
+          <a:p>
+            <a:pPr algn="ctr" indent="0" marL="0">
+              <a:buNone/>
+            </a:pPr>
+            <a:r>
+              <a:rPr lang="en-US" sz="1300" b="1" dirty="0">
+                <a:solidFill>
+                  <a:srgbClr val="F2F0EA"/>
+                </a:solidFill>
+                <a:latin typeface="Arial" pitchFamily="34" charset="0"/>
+                <a:ea typeface="Arial" pitchFamily="34" charset="-122"/>
+                <a:cs typeface="Arial" pitchFamily="34" charset="-120"/>
+              </a:rPr>
+              <a:t>3</a:t>
+            </a:r>
+            <a:endParaRPr lang="en-US" sz="1300" dirty="0"/>
+          </a:p>
+        </p:txBody>
+      </p:sp>
+      <p:sp>
+        <p:nvSpPr>
+          <p:cNvPr id="19" name="Text 16"/>
+          <p:cNvSpPr/>
+          <p:nvPr/>
+        </p:nvSpPr>
+        <p:spPr>
+          <a:xfrm>
+            <a:off x="1417320" y="4559808"/>
+            <a:ext cx="9174175" cy="882904"/>
+          </a:xfrm>
+          <a:prstGeom prst="rect">
+            <a:avLst/>
+          </a:prstGeom>
+          <a:noFill/>
+          <a:ln/>
+        </p:spPr>
+        <p:txBody>
+          <a:bodyPr wrap="square" lIns="0" tIns="0" rIns="0" bIns="0" rtlCol="0" anchor="t">
+            <a:normAutofit/>
+          </a:bodyPr>
+          <a:lstStyle/>
+          <a:p>
+            <a:pPr indent="0" marL="0">
+              <a:lnSpc>
+                <a:spcPct val="105000"/>
+              </a:lnSpc>
+              <a:buNone/>
+            </a:pPr>
+            <a:r>
+              <a:rPr lang="en-US" sz="2200" dirty="0">
+                <a:solidFill>
+                  <a:srgbClr val="F2F0EA"/>
+                </a:solidFill>
+                <a:latin typeface="Arial" pitchFamily="34" charset="0"/>
+                <a:ea typeface="Arial" pitchFamily="34" charset="-122"/>
+                <a:cs typeface="Arial" pitchFamily="34" charset="-120"/>
+              </a:rPr>
+              <a:t>Os deíticos, «este», «aqui», «tu», «aquele», só têm sentido em cena: é o teatro a apontar.</a:t>
+            </a:r>
+            <a:endParaRPr lang="en-US" sz="2200" dirty="0"/>
+          </a:p>
+        </p:txBody>
+      </p:sp>
+    </p:spTree>
+  </p:cSld>
+  <p:clrMapOvr>
+    <a:masterClrMapping/>
+  </p:clrMapOvr>
+</p:sld>
+</file>
+
+<file path=ppt/slides/slide12.xml><?xml version="1.0" encoding="utf-8"?>
+<p:sld xmlns:a="http://schemas.openxmlformats.org/drawingml/2006/main" xmlns:r="http://schemas.openxmlformats.org/officeDocument/2006/relationships" xmlns:p="http://schemas.openxmlformats.org/presentationml/2006/main">
+  <p:cSld name="Slide 12">
+    <p:bg>
+      <p:bgPr>
+        <a:solidFill>
+          <a:srgbClr val="111111"/>
+        </a:solidFill>
+      </p:bgPr>
+    </p:bg>
+    <p:spTree>
+      <p:nvGrpSpPr>
+        <p:cNvPr id="1" name=""/>
+        <p:cNvGrpSpPr/>
+        <p:nvPr/>
+      </p:nvGrpSpPr>
+      <p:grpSpPr>
+        <a:xfrm>
+          <a:off x="0" y="0"/>
+          <a:ext cx="0" cy="0"/>
+          <a:chOff x="0" y="0"/>
+          <a:chExt cx="0" cy="0"/>
+        </a:xfrm>
+      </p:grpSpPr>
+      <p:sp>
+        <p:nvSpPr>
+          <p:cNvPr id="3" name="Text 0"/>
+          <p:cNvSpPr/>
+          <p:nvPr/>
+        </p:nvSpPr>
+        <p:spPr>
+          <a:xfrm>
+            <a:off x="10637215" y="384048"/>
+            <a:ext cx="731520" cy="365760"/>
+          </a:xfrm>
+          <a:prstGeom prst="rect">
+            <a:avLst/>
+          </a:prstGeom>
+          <a:noFill/>
+          <a:ln/>
+        </p:spPr>
+        <p:txBody>
+          <a:bodyPr wrap="square" lIns="0" tIns="0" rIns="0" bIns="0" rtlCol="0" anchor="ctr"/>
+          <a:lstStyle/>
+          <a:p>
+            <a:pPr algn="r" indent="0" marL="0">
+              <a:buNone/>
+            </a:pPr>
+            <a:r>
+              <a:rPr lang="en-US" sz="1200" b="1" spc="300" kern="0" dirty="0">
+                <a:solidFill>
+                  <a:srgbClr val="A9A79F"/>
+                </a:solidFill>
+                <a:latin typeface="Arial" pitchFamily="34" charset="0"/>
+                <a:ea typeface="Arial" pitchFamily="34" charset="-122"/>
+                <a:cs typeface="Arial" pitchFamily="34" charset="-120"/>
+              </a:rPr>
+              <a:t>EPI</a:t>
+            </a:r>
+            <a:endParaRPr lang="en-US" sz="1200" dirty="0"/>
+          </a:p>
+        </p:txBody>
+      </p:sp>
+      <p:sp>
+        <p:nvSpPr>
+          <p:cNvPr id="4" name="Text 1"/>
+          <p:cNvSpPr/>
+          <p:nvPr/>
+        </p:nvSpPr>
+        <p:spPr>
+          <a:xfrm>
+            <a:off x="822960" y="6400800"/>
+            <a:ext cx="9631375" cy="274320"/>
+          </a:xfrm>
+          <a:prstGeom prst="rect">
+            <a:avLst/>
+          </a:prstGeom>
+          <a:noFill/>
+          <a:ln/>
+        </p:spPr>
+        <p:txBody>
+          <a:bodyPr wrap="square" lIns="0" tIns="0" rIns="0" bIns="0" rtlCol="0" anchor="ctr"/>
+          <a:lstStyle/>
+          <a:p>
+            <a:pPr indent="0" marL="0">
+              <a:buNone/>
+            </a:pPr>
+            <a:r>
+              <a:rPr lang="en-US" sz="1000" dirty="0">
+                <a:solidFill>
+                  <a:srgbClr val="A9A79F"/>
+                </a:solidFill>
+                <a:latin typeface="Arial" pitchFamily="34" charset="0"/>
+                <a:ea typeface="Arial" pitchFamily="34" charset="-122"/>
+                <a:cs typeface="Arial" pitchFamily="34" charset="-120"/>
+              </a:rPr>
+              <a:t>Lição M4-F08, «Ninguém»</a:t>
+            </a:r>
+            <a:endParaRPr lang="en-US" sz="1000" dirty="0"/>
+          </a:p>
+        </p:txBody>
+      </p:sp>
+      <p:sp>
+        <p:nvSpPr>
+          <p:cNvPr id="5" name="Text 2"/>
+          <p:cNvSpPr/>
+          <p:nvPr/>
+        </p:nvSpPr>
+        <p:spPr>
+          <a:xfrm>
+            <a:off x="10637215" y="6400800"/>
+            <a:ext cx="731520" cy="274320"/>
+          </a:xfrm>
+          <a:prstGeom prst="rect">
+            <a:avLst/>
+          </a:prstGeom>
+          <a:noFill/>
+          <a:ln/>
+        </p:spPr>
+        <p:txBody>
+          <a:bodyPr wrap="square" lIns="0" tIns="0" rIns="0" bIns="0" rtlCol="0" anchor="ctr"/>
+          <a:lstStyle/>
+          <a:p>
+            <a:pPr algn="r" indent="0" marL="0">
+              <a:buNone/>
+            </a:pPr>
+            <a:r>
+              <a:rPr lang="en-US" sz="1000" dirty="0">
+                <a:solidFill>
+                  <a:srgbClr val="A9A79F"/>
+                </a:solidFill>
+                <a:latin typeface="Arial" pitchFamily="34" charset="0"/>
+                <a:ea typeface="Arial" pitchFamily="34" charset="-122"/>
+                <a:cs typeface="Arial" pitchFamily="34" charset="-120"/>
+              </a:rPr>
+              <a:t>12</a:t>
             </a:r>
             <a:endParaRPr lang="en-US" sz="1000" dirty="0"/>
           </a:p>
